--- a/liveries/nasa/template.pptx
+++ b/liveries/nasa/template.pptx
@@ -3331,5 +3331,31 @@
   </a:themeElements>
   <a:objectDefaults/>
   <a:extraClrSchemeLst/>
+  <a:custClrLst>
+    <a:custClr name="Data 1 · Blue">
+      <a:srgbClr val="1159CD"/>
+    </a:custClr>
+    <a:custClr name="Data 2 · Red">
+      <a:srgbClr val="EF483F"/>
+    </a:custClr>
+    <a:custClr name="Data 3 · Orange">
+      <a:srgbClr val="E8892E"/>
+    </a:custClr>
+    <a:custClr name="Data 4 · Slate">
+      <a:srgbClr val="386470"/>
+    </a:custClr>
+    <a:custClr name="Data 5 · Gold">
+      <a:srgbClr val="B0A26A"/>
+    </a:custClr>
+    <a:custClr name="Data 6 · Blue">
+      <a:srgbClr val="3F83EF"/>
+    </a:custClr>
+    <a:custClr name="Data 7 · Red">
+      <a:srgbClr val="8F0800"/>
+    </a:custClr>
+    <a:custClr name="Data 8 · Slate">
+      <a:srgbClr val="79A3AD"/>
+    </a:custClr>
+  </a:custClrLst>
 </a:theme>
 </file>
--- a/liveries/nasa/template.pptx
+++ b/liveries/nasa/template.pptx
@@ -2707,8 +2707,8 @@
         </p:nvSpPr>
         <p:spPr>
           <a:xfrm>
-            <a:off x="0" y="252032"/>
-            <a:ext cx="164592" cy="490690"/>
+            <a:off x="0" y="251517"/>
+            <a:ext cx="164592" cy="400164"/>
           </a:xfrm>
           <a:prstGeom prst="rect">
             <a:avLst/>
@@ -2756,8 +2756,8 @@
         </p:nvSpPr>
         <p:spPr>
           <a:xfrm>
-            <a:off x="548640" y="252032"/>
-            <a:ext cx="7349573" cy="490690"/>
+            <a:off x="548640" y="251517"/>
+            <a:ext cx="7349573" cy="400164"/>
           </a:xfrm>
           <a:prstGeom prst="rect">
             <a:avLst/>

--- a/liveries/nasa/template.pptx
+++ b/liveries/nasa/template.pptx
@@ -2735,11 +2735,9 @@
           <a:prstGeom prst="line">
             <a:avLst/>
           </a:prstGeom>
-          <a:ln w="9525">
+          <a:ln w="8230">
             <a:solidFill>
-              <a:schemeClr val="tx1">
-                <a:alpha val="30000"/>
-              </a:schemeClr>
+              <a:srgbClr val="B0B1B2"/>
             </a:solidFill>
           </a:ln>
         </p:spPr>

--- a/liveries/nasa/template.pptx
+++ b/liveries/nasa/template.pptx
@@ -139,7 +139,7 @@
                 <a:spcPts val="0"/>
               </a:spcBef>
               <a:buNone/>
-              <a:defRPr sz="1000" b="1" cap="all">
+              <a:defRPr sz="1000" b="1" cap="all" spc="80">
                 <a:solidFill>
                   <a:srgbClr val="FFFFFF"/>
                 </a:solidFill>
@@ -2469,7 +2469,7 @@
                 <a:spcPts val="0"/>
               </a:spcBef>
               <a:buNone/>
-              <a:defRPr sz="1000" b="1" cap="all">
+              <a:defRPr sz="1000" b="1" cap="all" spc="80">
                 <a:solidFill>
                   <a:srgbClr val="1C1C1C"/>
                 </a:solidFill>

--- a/liveries/nasa/template.pptx
+++ b/liveries/nasa/template.pptx
@@ -139,7 +139,7 @@
                 <a:spcPts val="0"/>
               </a:spcBef>
               <a:buNone/>
-              <a:defRPr sz="1000" b="1" cap="all">
+              <a:defRPr sz="1000" b="1" cap="all" spc="80">
                 <a:solidFill>
                   <a:srgbClr val="FFFFFF"/>
                 </a:solidFill>
@@ -2469,7 +2469,7 @@
                 <a:spcPts val="0"/>
               </a:spcBef>
               <a:buNone/>
-              <a:defRPr sz="1000" b="1" cap="all">
+              <a:defRPr sz="1000" b="1" cap="all" spc="80">
                 <a:solidFill>
                   <a:srgbClr val="1C1C1C"/>
                 </a:solidFill>
@@ -2707,8 +2707,8 @@
         </p:nvSpPr>
         <p:spPr>
           <a:xfrm>
-            <a:off x="0" y="252032"/>
-            <a:ext cx="164592" cy="490690"/>
+            <a:off x="0" y="251517"/>
+            <a:ext cx="164592" cy="400164"/>
           </a:xfrm>
           <a:prstGeom prst="rect">
             <a:avLst/>
@@ -2735,11 +2735,9 @@
           <a:prstGeom prst="line">
             <a:avLst/>
           </a:prstGeom>
-          <a:ln w="9525">
+          <a:ln w="8230">
             <a:solidFill>
-              <a:schemeClr val="tx1">
-                <a:alpha val="30000"/>
-              </a:schemeClr>
+              <a:srgbClr val="B0B1B2"/>
             </a:solidFill>
           </a:ln>
         </p:spPr>
@@ -2756,8 +2754,8 @@
         </p:nvSpPr>
         <p:spPr>
           <a:xfrm>
-            <a:off x="548640" y="252032"/>
-            <a:ext cx="7349573" cy="490690"/>
+            <a:off x="548640" y="251517"/>
+            <a:ext cx="7349573" cy="400164"/>
           </a:xfrm>
           <a:prstGeom prst="rect">
             <a:avLst/>
